--- a/Reporte 190626.pptx
+++ b/Reporte 190626.pptx
@@ -6385,7 +6385,7 @@
                 <a:latin typeface="Montserrat Black"/>
                 <a:sym typeface="Arial"/>
               </a:rPr>
-              <a:t>Elaborado: 18</a:t>
+              <a:t>Elaborado: 19</a:t>
             </a:r>
             <a:r>
               <a:rPr lang="es-MX" sz="1600" dirty="0">
@@ -7279,10 +7279,10 @@
       </p:sp>
       <p:pic>
         <p:nvPicPr>
-          <p:cNvPr id="4" name="Imagen 3">
+          <p:cNvPr id="3" name="Imagen 2">
             <a:extLst>
               <a:ext uri="{FF2B5EF4-FFF2-40B4-BE49-F238E27FC236}">
-                <a16:creationId xmlns:a16="http://schemas.microsoft.com/office/drawing/2014/main" id="{8EE33BAD-A91C-93E2-16A7-EFC652A18DD7}"/>
+                <a16:creationId xmlns:a16="http://schemas.microsoft.com/office/drawing/2014/main" id="{3D7A7646-3BD7-ECBF-2608-8312D2637A80}"/>
               </a:ext>
             </a:extLst>
           </p:cNvPr>
@@ -7299,8 +7299,8 @@
         </p:blipFill>
         <p:spPr>
           <a:xfrm>
-            <a:off x="0" y="678520"/>
-            <a:ext cx="9144000" cy="3786459"/>
+            <a:off x="0" y="732833"/>
+            <a:ext cx="9144000" cy="3820709"/>
           </a:xfrm>
           <a:prstGeom prst="rect">
             <a:avLst/>
@@ -7393,10 +7393,10 @@
       </p:sp>
       <p:pic>
         <p:nvPicPr>
-          <p:cNvPr id="3" name="Imagen 2">
+          <p:cNvPr id="5" name="Imagen 4">
             <a:extLst>
               <a:ext uri="{FF2B5EF4-FFF2-40B4-BE49-F238E27FC236}">
-                <a16:creationId xmlns:a16="http://schemas.microsoft.com/office/drawing/2014/main" id="{13AD54E2-AF99-35B0-2C30-9B7D994CADF6}"/>
+                <a16:creationId xmlns:a16="http://schemas.microsoft.com/office/drawing/2014/main" id="{A6299CDB-07A3-1402-0388-496A60E0AB72}"/>
               </a:ext>
             </a:extLst>
           </p:cNvPr>
@@ -7413,8 +7413,8 @@
         </p:blipFill>
         <p:spPr>
           <a:xfrm>
-            <a:off x="0" y="1252683"/>
-            <a:ext cx="9144000" cy="2781010"/>
+            <a:off x="0" y="1259392"/>
+            <a:ext cx="9144000" cy="2767591"/>
           </a:xfrm>
           <a:prstGeom prst="rect">
             <a:avLst/>
@@ -7507,10 +7507,10 @@
       </p:sp>
       <p:pic>
         <p:nvPicPr>
-          <p:cNvPr id="2" name="Imagen 1">
+          <p:cNvPr id="3" name="Imagen 2">
             <a:extLst>
               <a:ext uri="{FF2B5EF4-FFF2-40B4-BE49-F238E27FC236}">
-                <a16:creationId xmlns:a16="http://schemas.microsoft.com/office/drawing/2014/main" id="{6BCA8F08-BAB4-1140-7C7C-9267449F6F85}"/>
+                <a16:creationId xmlns:a16="http://schemas.microsoft.com/office/drawing/2014/main" id="{F4F6C7FF-4883-F1EE-C954-515293C814C6}"/>
               </a:ext>
             </a:extLst>
           </p:cNvPr>
@@ -7611,10 +7611,10 @@
       </p:sp>
       <p:pic>
         <p:nvPicPr>
-          <p:cNvPr id="3" name="Imagen 2">
+          <p:cNvPr id="4" name="Imagen 3">
             <a:extLst>
               <a:ext uri="{FF2B5EF4-FFF2-40B4-BE49-F238E27FC236}">
-                <a16:creationId xmlns:a16="http://schemas.microsoft.com/office/drawing/2014/main" id="{EBC0F5DD-174C-9A78-C309-600890BED7A7}"/>
+                <a16:creationId xmlns:a16="http://schemas.microsoft.com/office/drawing/2014/main" id="{C34D02EA-EC5E-BD95-E949-A80833EEA666}"/>
               </a:ext>
             </a:extLst>
           </p:cNvPr>
@@ -7631,8 +7631,8 @@
         </p:blipFill>
         <p:spPr>
           <a:xfrm>
-            <a:off x="609047" y="1538134"/>
-            <a:ext cx="7925906" cy="2210108"/>
+            <a:off x="577298" y="733159"/>
+            <a:ext cx="7916380" cy="3820058"/>
           </a:xfrm>
           <a:prstGeom prst="rect">
             <a:avLst/>
@@ -7725,10 +7725,10 @@
       </p:sp>
       <p:pic>
         <p:nvPicPr>
-          <p:cNvPr id="4" name="Imagen 3">
+          <p:cNvPr id="3" name="Imagen 2">
             <a:extLst>
               <a:ext uri="{FF2B5EF4-FFF2-40B4-BE49-F238E27FC236}">
-                <a16:creationId xmlns:a16="http://schemas.microsoft.com/office/drawing/2014/main" id="{7532A83C-4FE1-D2E1-C91F-4CE3C1BA6812}"/>
+                <a16:creationId xmlns:a16="http://schemas.microsoft.com/office/drawing/2014/main" id="{B1560F10-BC40-5A51-BF8E-C91B5DF8EB27}"/>
               </a:ext>
             </a:extLst>
           </p:cNvPr>
@@ -7745,8 +7745,8 @@
         </p:blipFill>
         <p:spPr>
           <a:xfrm>
-            <a:off x="0" y="740247"/>
-            <a:ext cx="9144000" cy="3805881"/>
+            <a:off x="0" y="717227"/>
+            <a:ext cx="9144000" cy="3851922"/>
           </a:xfrm>
           <a:prstGeom prst="rect">
             <a:avLst/>
@@ -7839,10 +7839,10 @@
       </p:sp>
       <p:pic>
         <p:nvPicPr>
-          <p:cNvPr id="3" name="Imagen 2">
+          <p:cNvPr id="2" name="Imagen 1">
             <a:extLst>
               <a:ext uri="{FF2B5EF4-FFF2-40B4-BE49-F238E27FC236}">
-                <a16:creationId xmlns:a16="http://schemas.microsoft.com/office/drawing/2014/main" id="{379A3514-3205-25B5-E61E-31147938193F}"/>
+                <a16:creationId xmlns:a16="http://schemas.microsoft.com/office/drawing/2014/main" id="{97BF45D5-694C-2427-CBC6-019253FDA22D}"/>
               </a:ext>
             </a:extLst>
           </p:cNvPr>
@@ -7953,10 +7953,10 @@
       </p:sp>
       <p:pic>
         <p:nvPicPr>
-          <p:cNvPr id="2" name="Imagen 1">
+          <p:cNvPr id="3" name="Imagen 2">
             <a:extLst>
               <a:ext uri="{FF2B5EF4-FFF2-40B4-BE49-F238E27FC236}">
-                <a16:creationId xmlns:a16="http://schemas.microsoft.com/office/drawing/2014/main" id="{EE64AAB7-5D94-1DF2-7B37-ADC6BDFF6A3E}"/>
+                <a16:creationId xmlns:a16="http://schemas.microsoft.com/office/drawing/2014/main" id="{E42E2349-9383-DF8F-3273-06ABBDF74F11}"/>
               </a:ext>
             </a:extLst>
           </p:cNvPr>
@@ -7973,8 +7973,8 @@
         </p:blipFill>
         <p:spPr>
           <a:xfrm>
-            <a:off x="1113385" y="691088"/>
-            <a:ext cx="6844205" cy="3904200"/>
+            <a:off x="887671" y="562332"/>
+            <a:ext cx="7295633" cy="4161712"/>
           </a:xfrm>
           <a:prstGeom prst="rect">
             <a:avLst/>
@@ -8063,10 +8063,10 @@
       </p:sp>
       <p:pic>
         <p:nvPicPr>
-          <p:cNvPr id="4" name="Imagen 3">
+          <p:cNvPr id="3" name="Imagen 2">
             <a:extLst>
               <a:ext uri="{FF2B5EF4-FFF2-40B4-BE49-F238E27FC236}">
-                <a16:creationId xmlns:a16="http://schemas.microsoft.com/office/drawing/2014/main" id="{206EAF18-395E-376C-64FA-4411B8796B86}"/>
+                <a16:creationId xmlns:a16="http://schemas.microsoft.com/office/drawing/2014/main" id="{A75802C7-5706-07BF-1C3C-88FBAB40493C}"/>
               </a:ext>
             </a:extLst>
           </p:cNvPr>
@@ -8083,8 +8083,8 @@
         </p:blipFill>
         <p:spPr>
           <a:xfrm>
-            <a:off x="577297" y="1247580"/>
-            <a:ext cx="7916380" cy="2791215"/>
+            <a:off x="1515739" y="1611033"/>
+            <a:ext cx="6039498" cy="2064309"/>
           </a:xfrm>
           <a:prstGeom prst="rect">
             <a:avLst/>

--- a/Reporte 190626.pptx
+++ b/Reporte 190626.pptx
@@ -6511,10 +6511,10 @@
       </p:sp>
       <p:pic>
         <p:nvPicPr>
-          <p:cNvPr id="5" name="Imagen 4">
+          <p:cNvPr id="4" name="Imagen 3">
             <a:extLst>
               <a:ext uri="{FF2B5EF4-FFF2-40B4-BE49-F238E27FC236}">
-                <a16:creationId xmlns:a16="http://schemas.microsoft.com/office/drawing/2014/main" id="{45F23890-880B-DD27-D714-570FFB23551C}"/>
+                <a16:creationId xmlns:a16="http://schemas.microsoft.com/office/drawing/2014/main" id="{26E7E212-B9A3-A3E2-696D-E554248824A1}"/>
               </a:ext>
             </a:extLst>
           </p:cNvPr>
@@ -6531,8 +6531,8 @@
         </p:blipFill>
         <p:spPr>
           <a:xfrm>
-            <a:off x="-6725" y="624120"/>
-            <a:ext cx="9144000" cy="4038136"/>
+            <a:off x="-6725" y="673633"/>
+            <a:ext cx="9144000" cy="3939109"/>
           </a:xfrm>
           <a:prstGeom prst="rect">
             <a:avLst/>
@@ -6609,10 +6609,10 @@
       </p:sp>
       <p:pic>
         <p:nvPicPr>
-          <p:cNvPr id="4" name="Imagen 3">
+          <p:cNvPr id="3" name="Imagen 2">
             <a:extLst>
               <a:ext uri="{FF2B5EF4-FFF2-40B4-BE49-F238E27FC236}">
-                <a16:creationId xmlns:a16="http://schemas.microsoft.com/office/drawing/2014/main" id="{68B39942-4E10-02BF-FDCD-3945D314E3F0}"/>
+                <a16:creationId xmlns:a16="http://schemas.microsoft.com/office/drawing/2014/main" id="{36C795D8-48B2-C900-4066-9E4A0CDA5853}"/>
               </a:ext>
             </a:extLst>
           </p:cNvPr>
@@ -6629,8 +6629,8 @@
         </p:blipFill>
         <p:spPr>
           <a:xfrm>
-            <a:off x="0" y="1146206"/>
-            <a:ext cx="9144000" cy="2993964"/>
+            <a:off x="0" y="1198191"/>
+            <a:ext cx="9144000" cy="2889993"/>
           </a:xfrm>
           <a:prstGeom prst="rect">
             <a:avLst/>
@@ -6713,10 +6713,10 @@
       </p:sp>
       <p:pic>
         <p:nvPicPr>
-          <p:cNvPr id="4" name="Imagen 3">
+          <p:cNvPr id="3" name="Imagen 2">
             <a:extLst>
               <a:ext uri="{FF2B5EF4-FFF2-40B4-BE49-F238E27FC236}">
-                <a16:creationId xmlns:a16="http://schemas.microsoft.com/office/drawing/2014/main" id="{BB614572-666D-FD69-5417-2B795CE8DDBC}"/>
+                <a16:creationId xmlns:a16="http://schemas.microsoft.com/office/drawing/2014/main" id="{2EE9499C-5200-B517-76DB-C1B561693066}"/>
               </a:ext>
             </a:extLst>
           </p:cNvPr>
@@ -6733,8 +6733,8 @@
         </p:blipFill>
         <p:spPr>
           <a:xfrm>
-            <a:off x="0" y="750322"/>
-            <a:ext cx="9144000" cy="3785732"/>
+            <a:off x="0" y="983646"/>
+            <a:ext cx="9144000" cy="3319084"/>
           </a:xfrm>
           <a:prstGeom prst="rect">
             <a:avLst/>
@@ -6811,10 +6811,10 @@
       </p:sp>
       <p:pic>
         <p:nvPicPr>
-          <p:cNvPr id="4" name="Imagen 3">
+          <p:cNvPr id="5" name="Imagen 4">
             <a:extLst>
               <a:ext uri="{FF2B5EF4-FFF2-40B4-BE49-F238E27FC236}">
-                <a16:creationId xmlns:a16="http://schemas.microsoft.com/office/drawing/2014/main" id="{4FCBE318-A776-5B76-8AC6-8C18DE4513A6}"/>
+                <a16:creationId xmlns:a16="http://schemas.microsoft.com/office/drawing/2014/main" id="{66219BF6-CFF2-6677-3456-8C60A816C787}"/>
               </a:ext>
             </a:extLst>
           </p:cNvPr>
@@ -6831,8 +6831,8 @@
         </p:blipFill>
         <p:spPr>
           <a:xfrm>
-            <a:off x="0" y="1106655"/>
-            <a:ext cx="9144000" cy="3073066"/>
+            <a:off x="0" y="1076594"/>
+            <a:ext cx="9144000" cy="3133187"/>
           </a:xfrm>
           <a:prstGeom prst="rect">
             <a:avLst/>
@@ -6909,10 +6909,10 @@
       </p:sp>
       <p:pic>
         <p:nvPicPr>
-          <p:cNvPr id="3" name="Imagen 2">
+          <p:cNvPr id="4" name="Imagen 3">
             <a:extLst>
               <a:ext uri="{FF2B5EF4-FFF2-40B4-BE49-F238E27FC236}">
-                <a16:creationId xmlns:a16="http://schemas.microsoft.com/office/drawing/2014/main" id="{01E6C053-A166-E9D2-1334-6305E2C69170}"/>
+                <a16:creationId xmlns:a16="http://schemas.microsoft.com/office/drawing/2014/main" id="{8DF6B71F-EAF5-E51C-C9CA-39B6CE2304C2}"/>
               </a:ext>
             </a:extLst>
           </p:cNvPr>
@@ -6929,8 +6929,8 @@
         </p:blipFill>
         <p:spPr>
           <a:xfrm>
-            <a:off x="0" y="1514728"/>
-            <a:ext cx="9144000" cy="2114044"/>
+            <a:off x="0" y="533204"/>
+            <a:ext cx="9144000" cy="4321891"/>
           </a:xfrm>
           <a:prstGeom prst="rect">
             <a:avLst/>
@@ -7013,10 +7013,10 @@
       </p:sp>
       <p:pic>
         <p:nvPicPr>
-          <p:cNvPr id="4" name="Imagen 3">
+          <p:cNvPr id="3" name="Imagen 2">
             <a:extLst>
               <a:ext uri="{FF2B5EF4-FFF2-40B4-BE49-F238E27FC236}">
-                <a16:creationId xmlns:a16="http://schemas.microsoft.com/office/drawing/2014/main" id="{96367313-8478-90BF-0295-22E477DD225F}"/>
+                <a16:creationId xmlns:a16="http://schemas.microsoft.com/office/drawing/2014/main" id="{D828D105-D408-4135-3EBE-306100300E80}"/>
               </a:ext>
             </a:extLst>
           </p:cNvPr>
@@ -7033,8 +7033,8 @@
         </p:blipFill>
         <p:spPr>
           <a:xfrm>
-            <a:off x="0" y="409008"/>
-            <a:ext cx="9144000" cy="4325483"/>
+            <a:off x="0" y="775590"/>
+            <a:ext cx="9144000" cy="3735195"/>
           </a:xfrm>
           <a:prstGeom prst="rect">
             <a:avLst/>
@@ -7111,10 +7111,10 @@
       </p:sp>
       <p:pic>
         <p:nvPicPr>
-          <p:cNvPr id="4" name="Imagen 3">
+          <p:cNvPr id="3" name="Imagen 2">
             <a:extLst>
               <a:ext uri="{FF2B5EF4-FFF2-40B4-BE49-F238E27FC236}">
-                <a16:creationId xmlns:a16="http://schemas.microsoft.com/office/drawing/2014/main" id="{29AD154E-5907-6941-1EC2-5EA817860088}"/>
+                <a16:creationId xmlns:a16="http://schemas.microsoft.com/office/drawing/2014/main" id="{82E2C46C-5B03-FF77-2B40-B76E7D68A394}"/>
               </a:ext>
             </a:extLst>
           </p:cNvPr>
@@ -7131,8 +7131,8 @@
         </p:blipFill>
         <p:spPr>
           <a:xfrm>
-            <a:off x="1553747" y="780790"/>
-            <a:ext cx="5963482" cy="3724795"/>
+            <a:off x="1623601" y="433089"/>
+            <a:ext cx="5896798" cy="4277322"/>
           </a:xfrm>
           <a:prstGeom prst="rect">
             <a:avLst/>
